--- a/presentations/PR_L04_LapCounter_Lesson.pptx
+++ b/presentations/PR_L04_LapCounter_Lesson.pptx
@@ -2617,7 +2617,7 @@
                 <a:ea typeface="IBM Plex Sans" pitchFamily="34" charset="-122"/>
                 <a:cs typeface="IBM Plex Sans" pitchFamily="34" charset="-120"/>
               </a:rPr>
-              <a:t>Mistake: printing inside the loop when the task asks for one line at the end.</a:t>
+              <a:t>Common mistake: printing inside the loop when the task asks for one line at the end.</a:t>
             </a:r>
             <a:endParaRPr lang="en-US" sz="1700" dirty="0"/>
           </a:p>
@@ -7839,7 +7839,7 @@
                 <a:ea typeface="IBM Plex Sans" pitchFamily="34" charset="-122"/>
                 <a:cs typeface="IBM Plex Sans" pitchFamily="34" charset="-120"/>
               </a:rPr>
-              <a:t>Mistake: leaving the line to repeat outside the loop, so it only runs once.</a:t>
+              <a:t>Common mistake: leaving the line to repeat outside the loop, so it only runs once.</a:t>
             </a:r>
             <a:endParaRPr lang="en-US" sz="1700" dirty="0"/>
           </a:p>
@@ -8415,7 +8415,7 @@
                 <a:ea typeface="IBM Plex Sans" pitchFamily="34" charset="-122"/>
                 <a:cs typeface="IBM Plex Sans" pitchFamily="34" charset="-120"/>
               </a:rPr>
-              <a:t>Mistake: expecting range(5) to include 5, or to start at 1.</a:t>
+              <a:t>Common mistake: expecting range(5) to include 5, or to start at 1.</a:t>
             </a:r>
             <a:endParaRPr lang="en-US" sz="1700" dirty="0"/>
           </a:p>
@@ -8991,7 +8991,7 @@
                 <a:ea typeface="IBM Plex Sans" pitchFamily="34" charset="-122"/>
                 <a:cs typeface="IBM Plex Sans" pitchFamily="34" charset="-120"/>
               </a:rPr>
-              <a:t>Mistake: forgetting stop is never reached, which quietly loses the last value.</a:t>
+              <a:t>Common mistake: forgetting stop is never reached, which quietly loses the last value.</a:t>
             </a:r>
             <a:endParaRPr lang="en-US" sz="1700" dirty="0"/>
           </a:p>
@@ -9567,7 +9567,7 @@
                 <a:ea typeface="IBM Plex Sans" pitchFamily="34" charset="-122"/>
                 <a:cs typeface="IBM Plex Sans" pitchFamily="34" charset="-120"/>
               </a:rPr>
-              <a:t>Mistake: setting the total back to 0 inside the loop, which loses everything counted so far.</a:t>
+              <a:t>Common mistake: setting the total back to 0 inside the loop, which loses everything counted so far.</a:t>
             </a:r>
             <a:endParaRPr lang="en-US" sz="1700" dirty="0"/>
           </a:p>
@@ -10143,7 +10143,7 @@
                 <a:ea typeface="IBM Plex Sans" pitchFamily="34" charset="-122"/>
                 <a:cs typeface="IBM Plex Sans" pitchFamily="34" charset="-120"/>
               </a:rPr>
-              <a:t>Mistake: indenting the inner loop's body wrongly, so all the rows run together.</a:t>
+              <a:t>Common mistake: indenting the inner loop's body wrongly, so all the rows run together.</a:t>
             </a:r>
             <a:endParaRPr lang="en-US" sz="1700" dirty="0"/>
           </a:p>
